--- a/Amazing Grace-CH.pptx
+++ b/Amazing Grace-CH.pptx
@@ -4745,48 +4745,6 @@
           </a:p>
         </p:txBody>
       </p:sp>
-      <p:sp>
-        <p:nvSpPr>
-          <p:cNvPr id="2" name="TextBox 1">
-            <a:extLst>
-              <a:ext uri="{FF2B5EF4-FFF2-40B4-BE49-F238E27FC236}">
-                <a16:creationId xmlns:a16="http://schemas.microsoft.com/office/drawing/2014/main" id="{0DFB5495-3789-C3DC-7CF0-8F712EE63812}"/>
-              </a:ext>
-            </a:extLst>
-          </p:cNvPr>
-          <p:cNvSpPr txBox="1"/>
-          <p:nvPr/>
-        </p:nvSpPr>
-        <p:spPr>
-          <a:xfrm>
-            <a:off x="10793843" y="6150114"/>
-            <a:ext cx="1210588" cy="707886"/>
-          </a:xfrm>
-          <a:prstGeom prst="rect">
-            <a:avLst/>
-          </a:prstGeom>
-          <a:noFill/>
-        </p:spPr>
-        <p:txBody>
-          <a:bodyPr wrap="none" rtlCol="0">
-            <a:spAutoFit/>
-          </a:bodyPr>
-          <a:lstStyle/>
-          <a:p>
-            <a:r>
-              <a:rPr lang="en-US" sz="4000" b="1" dirty="0">
-                <a:solidFill>
-                  <a:schemeClr val="tx2">
-                    <a:lumMod val="10000"/>
-                    <a:lumOff val="90000"/>
-                  </a:schemeClr>
-                </a:solidFill>
-              </a:rPr>
-              <a:t>END</a:t>
-            </a:r>
-          </a:p>
-        </p:txBody>
-      </p:sp>
     </p:spTree>
     <p:extLst>
       <p:ext uri="{BB962C8B-B14F-4D97-AF65-F5344CB8AC3E}">
@@ -4970,6 +4928,48 @@
                 <a:ea typeface="Bodoni Ornaments" pitchFamily="2" charset="0"/>
               </a:rPr>
               <a:t>As long as life endures</a:t>
+            </a:r>
+          </a:p>
+        </p:txBody>
+      </p:sp>
+      <p:sp>
+        <p:nvSpPr>
+          <p:cNvPr id="4" name="TextBox 3">
+            <a:extLst>
+              <a:ext uri="{FF2B5EF4-FFF2-40B4-BE49-F238E27FC236}">
+                <a16:creationId xmlns:a16="http://schemas.microsoft.com/office/drawing/2014/main" id="{690829A0-8495-04B5-FFBE-F5DB306DBB44}"/>
+              </a:ext>
+            </a:extLst>
+          </p:cNvPr>
+          <p:cNvSpPr txBox="1"/>
+          <p:nvPr/>
+        </p:nvSpPr>
+        <p:spPr>
+          <a:xfrm>
+            <a:off x="10793843" y="6150114"/>
+            <a:ext cx="1210588" cy="707886"/>
+          </a:xfrm>
+          <a:prstGeom prst="rect">
+            <a:avLst/>
+          </a:prstGeom>
+          <a:noFill/>
+        </p:spPr>
+        <p:txBody>
+          <a:bodyPr wrap="none" rtlCol="0">
+            <a:spAutoFit/>
+          </a:bodyPr>
+          <a:lstStyle/>
+          <a:p>
+            <a:r>
+              <a:rPr lang="en-US" sz="4000" b="1" dirty="0">
+                <a:solidFill>
+                  <a:schemeClr val="tx2">
+                    <a:lumMod val="10000"/>
+                    <a:lumOff val="90000"/>
+                  </a:schemeClr>
+                </a:solidFill>
+              </a:rPr>
+              <a:t>END</a:t>
             </a:r>
           </a:p>
         </p:txBody>

--- a/Amazing Grace-CH.pptx
+++ b/Amazing Grace-CH.pptx
@@ -4265,7 +4265,7 @@
                 <a:latin typeface="Avenir Medium" panose="02000503020000020003" pitchFamily="2" charset="0"/>
                 <a:ea typeface="Bodoni Ornaments" pitchFamily="2" charset="0"/>
               </a:rPr>
-              <a:t>   C                            F               C</a:t>
+              <a:t>   G                            C               G</a:t>
             </a:r>
           </a:p>
           <a:p>
@@ -4291,7 +4291,7 @@
                 <a:latin typeface="Avenir Medium" panose="02000503020000020003" pitchFamily="2" charset="0"/>
                 <a:ea typeface="Bodoni Ornaments" pitchFamily="2" charset="0"/>
               </a:rPr>
-              <a:t>        C                              G</a:t>
+              <a:t>        G                              D</a:t>
             </a:r>
           </a:p>
           <a:p>
@@ -4317,7 +4317,7 @@
                 <a:latin typeface="Avenir Medium" panose="02000503020000020003" pitchFamily="2" charset="0"/>
                 <a:ea typeface="Bodoni Ornaments" pitchFamily="2" charset="0"/>
               </a:rPr>
-              <a:t>  C                           F                   C</a:t>
+              <a:t>  G                           C                   G</a:t>
             </a:r>
           </a:p>
           <a:p>
@@ -4343,7 +4343,7 @@
                 <a:latin typeface="Avenir Medium" panose="02000503020000020003" pitchFamily="2" charset="0"/>
                 <a:ea typeface="Bodoni Ornaments" pitchFamily="2" charset="0"/>
               </a:rPr>
-              <a:t>        C             G        C</a:t>
+              <a:t>        G             D        G</a:t>
             </a:r>
           </a:p>
           <a:p>
@@ -4452,7 +4452,7 @@
                 <a:latin typeface="Avenir Medium" panose="02000503020000020003" pitchFamily="2" charset="0"/>
                 <a:ea typeface="Bodoni Ornaments" pitchFamily="2" charset="0"/>
               </a:rPr>
-              <a:t>          G                                  F           C</a:t>
+              <a:t>          G                                  C           G</a:t>
             </a:r>
           </a:p>
           <a:p>
@@ -4488,7 +4488,7 @@
                 <a:latin typeface="Avenir Medium" panose="02000503020000020003" pitchFamily="2" charset="0"/>
                 <a:ea typeface="Bodoni Ornaments" pitchFamily="2" charset="0"/>
               </a:rPr>
-              <a:t>C                        G</a:t>
+              <a:t>G                                D</a:t>
             </a:r>
           </a:p>
           <a:p>
@@ -4514,7 +4514,7 @@
                 <a:latin typeface="Avenir Medium" panose="02000503020000020003" pitchFamily="2" charset="0"/>
                 <a:ea typeface="Bodoni Ornaments" pitchFamily="2" charset="0"/>
               </a:rPr>
-              <a:t>          C                         F             C</a:t>
+              <a:t>          G                         C             G</a:t>
             </a:r>
           </a:p>
           <a:p>
@@ -4540,7 +4540,7 @@
                 <a:latin typeface="Avenir Medium" panose="02000503020000020003" pitchFamily="2" charset="0"/>
                 <a:ea typeface="Bodoni Ornaments" pitchFamily="2" charset="0"/>
               </a:rPr>
-              <a:t>       C         G          C</a:t>
+              <a:t>       G         D          G</a:t>
             </a:r>
           </a:p>
           <a:p>
@@ -4649,7 +4649,7 @@
                 <a:latin typeface="Avenir Medium" panose="02000503020000020003" pitchFamily="2" charset="0"/>
                 <a:ea typeface="Bodoni Ornaments" pitchFamily="2" charset="0"/>
               </a:rPr>
-              <a:t>                 C                   F             C</a:t>
+              <a:t>                 G                   C             G</a:t>
             </a:r>
           </a:p>
           <a:p>
@@ -4675,7 +4675,7 @@
                 <a:latin typeface="Avenir Medium" panose="02000503020000020003" pitchFamily="2" charset="0"/>
                 <a:ea typeface="Bodoni Ornaments" pitchFamily="2" charset="0"/>
               </a:rPr>
-              <a:t>   C                  G</a:t>
+              <a:t>   G                  D</a:t>
             </a:r>
           </a:p>
           <a:p>
@@ -4701,7 +4701,7 @@
                 <a:latin typeface="Avenir Medium" panose="02000503020000020003" pitchFamily="2" charset="0"/>
                 <a:ea typeface="Bodoni Ornaments" pitchFamily="2" charset="0"/>
               </a:rPr>
-              <a:t>       C               F                   C</a:t>
+              <a:t>       G               C                   G</a:t>
             </a:r>
           </a:p>
           <a:p>
@@ -4727,7 +4727,7 @@
                 <a:latin typeface="Avenir Medium" panose="02000503020000020003" pitchFamily="2" charset="0"/>
                 <a:ea typeface="Bodoni Ornaments" pitchFamily="2" charset="0"/>
               </a:rPr>
-              <a:t>        C              G           C</a:t>
+              <a:t>        G              D           G</a:t>
             </a:r>
           </a:p>
           <a:p>
@@ -4836,7 +4836,7 @@
                 <a:latin typeface="Avenir Medium" panose="02000503020000020003" pitchFamily="2" charset="0"/>
                 <a:ea typeface="Bodoni Ornaments" pitchFamily="2" charset="0"/>
               </a:rPr>
-              <a:t>       C                             F            C</a:t>
+              <a:t>       G                             C            G</a:t>
             </a:r>
           </a:p>
           <a:p>
@@ -4862,7 +4862,7 @@
                 <a:latin typeface="Avenir Medium" panose="02000503020000020003" pitchFamily="2" charset="0"/>
                 <a:ea typeface="Bodoni Ornaments" pitchFamily="2" charset="0"/>
               </a:rPr>
-              <a:t>       C                      G</a:t>
+              <a:t>       G                      D</a:t>
             </a:r>
           </a:p>
           <a:p>
@@ -4888,7 +4888,7 @@
                 <a:latin typeface="Avenir Medium" panose="02000503020000020003" pitchFamily="2" charset="0"/>
                 <a:ea typeface="Bodoni Ornaments" pitchFamily="2" charset="0"/>
               </a:rPr>
-              <a:t>       C                           F          C</a:t>
+              <a:t>       G                           C          G</a:t>
             </a:r>
           </a:p>
           <a:p>
@@ -4914,7 +4914,27 @@
                 <a:latin typeface="Avenir Medium" panose="02000503020000020003" pitchFamily="2" charset="0"/>
                 <a:ea typeface="Bodoni Ornaments" pitchFamily="2" charset="0"/>
               </a:rPr>
-              <a:t>     C          G           C</a:t>
+              <a:t>     </a:t>
+            </a:r>
+            <a:r>
+              <a:rPr lang="en-US" sz="3600">
+                <a:solidFill>
+                  <a:srgbClr val="FFFF00"/>
+                </a:solidFill>
+                <a:latin typeface="Avenir Medium" panose="02000503020000020003" pitchFamily="2" charset="0"/>
+                <a:ea typeface="Bodoni Ornaments" pitchFamily="2" charset="0"/>
+              </a:rPr>
+              <a:t>G          D           </a:t>
+            </a:r>
+            <a:r>
+              <a:rPr lang="en-US" sz="3600" dirty="0">
+                <a:solidFill>
+                  <a:srgbClr val="FFFF00"/>
+                </a:solidFill>
+                <a:latin typeface="Avenir Medium" panose="02000503020000020003" pitchFamily="2" charset="0"/>
+                <a:ea typeface="Bodoni Ornaments" pitchFamily="2" charset="0"/>
+              </a:rPr>
+              <a:t>G</a:t>
             </a:r>
           </a:p>
           <a:p>
